--- a/docs/lectures/5/slides.pptx
+++ b/docs/lectures/5/slides.pptx
@@ -233,7 +233,7 @@
           <a:p>
             <a:fld id="{0D08E07E-6A0C-45D2-82C4-0096ACCC8306}" type="datetimeFigureOut">
               <a:rPr lang="en-GB" smtClean="0"/>
-              <a:t>21/10/2026</a:t>
+              <a:t>22/10/2026</a:t>
             </a:fld>
             <a:endParaRPr lang="en-GB"/>
           </a:p>
@@ -1043,7 +1043,7 @@
           <a:p>
             <a:fld id="{098BDEFC-EEE3-42B8-A278-D7D69FECCD1F}" type="datetimeFigureOut">
               <a:rPr lang="en-GB" smtClean="0"/>
-              <a:t>21/10/2026</a:t>
+              <a:t>22/10/2026</a:t>
             </a:fld>
             <a:endParaRPr lang="en-GB"/>
           </a:p>
@@ -1243,7 +1243,7 @@
           <a:p>
             <a:fld id="{098BDEFC-EEE3-42B8-A278-D7D69FECCD1F}" type="datetimeFigureOut">
               <a:rPr lang="en-GB" smtClean="0"/>
-              <a:t>21/10/2026</a:t>
+              <a:t>22/10/2026</a:t>
             </a:fld>
             <a:endParaRPr lang="en-GB"/>
           </a:p>
@@ -1453,7 +1453,7 @@
           <a:p>
             <a:fld id="{098BDEFC-EEE3-42B8-A278-D7D69FECCD1F}" type="datetimeFigureOut">
               <a:rPr lang="en-GB" smtClean="0"/>
-              <a:t>21/10/2026</a:t>
+              <a:t>22/10/2026</a:t>
             </a:fld>
             <a:endParaRPr lang="en-GB"/>
           </a:p>
@@ -1696,7 +1696,7 @@
           <a:p>
             <a:fld id="{D1666282-696E-4BC8-B8B0-F336AA0FA017}" type="datetime1">
               <a:rPr lang="en-GB" smtClean="0"/>
-              <a:t>21/10/2026</a:t>
+              <a:t>22/10/2026</a:t>
             </a:fld>
             <a:endParaRPr lang="en-GB"/>
           </a:p>
@@ -1904,7 +1904,7 @@
           <a:p>
             <a:fld id="{098BDEFC-EEE3-42B8-A278-D7D69FECCD1F}" type="datetimeFigureOut">
               <a:rPr lang="en-GB" smtClean="0"/>
-              <a:t>21/10/2026</a:t>
+              <a:t>22/10/2026</a:t>
             </a:fld>
             <a:endParaRPr lang="en-GB"/>
           </a:p>
@@ -2180,7 +2180,7 @@
           <a:p>
             <a:fld id="{098BDEFC-EEE3-42B8-A278-D7D69FECCD1F}" type="datetimeFigureOut">
               <a:rPr lang="en-GB" smtClean="0"/>
-              <a:t>21/10/2026</a:t>
+              <a:t>22/10/2026</a:t>
             </a:fld>
             <a:endParaRPr lang="en-GB"/>
           </a:p>
@@ -2448,7 +2448,7 @@
           <a:p>
             <a:fld id="{098BDEFC-EEE3-42B8-A278-D7D69FECCD1F}" type="datetimeFigureOut">
               <a:rPr lang="en-GB" smtClean="0"/>
-              <a:t>21/10/2026</a:t>
+              <a:t>22/10/2026</a:t>
             </a:fld>
             <a:endParaRPr lang="en-GB"/>
           </a:p>
@@ -2863,7 +2863,7 @@
           <a:p>
             <a:fld id="{098BDEFC-EEE3-42B8-A278-D7D69FECCD1F}" type="datetimeFigureOut">
               <a:rPr lang="en-GB" smtClean="0"/>
-              <a:t>21/10/2026</a:t>
+              <a:t>22/10/2026</a:t>
             </a:fld>
             <a:endParaRPr lang="en-GB"/>
           </a:p>
@@ -3005,7 +3005,7 @@
           <a:p>
             <a:fld id="{098BDEFC-EEE3-42B8-A278-D7D69FECCD1F}" type="datetimeFigureOut">
               <a:rPr lang="en-GB" smtClean="0"/>
-              <a:t>21/10/2026</a:t>
+              <a:t>22/10/2026</a:t>
             </a:fld>
             <a:endParaRPr lang="en-GB"/>
           </a:p>
@@ -3118,7 +3118,7 @@
           <a:p>
             <a:fld id="{098BDEFC-EEE3-42B8-A278-D7D69FECCD1F}" type="datetimeFigureOut">
               <a:rPr lang="en-GB" smtClean="0"/>
-              <a:t>21/10/2026</a:t>
+              <a:t>22/10/2026</a:t>
             </a:fld>
             <a:endParaRPr lang="en-GB"/>
           </a:p>
@@ -3431,7 +3431,7 @@
           <a:p>
             <a:fld id="{098BDEFC-EEE3-42B8-A278-D7D69FECCD1F}" type="datetimeFigureOut">
               <a:rPr lang="en-GB" smtClean="0"/>
-              <a:t>21/10/2026</a:t>
+              <a:t>22/10/2026</a:t>
             </a:fld>
             <a:endParaRPr lang="en-GB"/>
           </a:p>
@@ -3720,7 +3720,7 @@
           <a:p>
             <a:fld id="{098BDEFC-EEE3-42B8-A278-D7D69FECCD1F}" type="datetimeFigureOut">
               <a:rPr lang="en-GB" smtClean="0"/>
-              <a:t>21/10/2026</a:t>
+              <a:t>22/10/2026</a:t>
             </a:fld>
             <a:endParaRPr lang="en-GB"/>
           </a:p>
@@ -3963,7 +3963,7 @@
           <a:p>
             <a:fld id="{098BDEFC-EEE3-42B8-A278-D7D69FECCD1F}" type="datetimeFigureOut">
               <a:rPr lang="en-GB" smtClean="0"/>
-              <a:t>21/10/2026</a:t>
+              <a:t>22/10/2026</a:t>
             </a:fld>
             <a:endParaRPr lang="en-GB"/>
           </a:p>
@@ -5579,34 +5579,20 @@
                 <a:latin typeface="Arial" panose="020B0604020202020204" pitchFamily="34" charset="0"/>
                 <a:cs typeface="Arial" panose="020B0604020202020204" pitchFamily="34" charset="0"/>
               </a:rPr>
-              <a:t>object ~/.</a:t>
-            </a:r>
-            <a:r>
-              <a:rPr lang="en-GB" sz="2000" dirty="0">
+              <a:t>object O1:</a:t>
+            </a:r>
+            <a:r>
+              <a:rPr lang="en-GB" sz="2000" b="0" i="0" u="none" strike="noStrike" dirty="0">
                 <a:latin typeface="Arial" panose="020B0604020202020204" pitchFamily="34" charset="0"/>
                 <a:cs typeface="Arial" panose="020B0604020202020204" pitchFamily="34" charset="0"/>
               </a:rPr>
-              <a:t>ssh/key</a:t>
+              <a:t> </a:t>
             </a:r>
             <a:r>
               <a:rPr lang="en-GB" sz="2000" b="0" i="0" u="none" strike="noStrike" baseline="0" dirty="0">
                 <a:latin typeface="Arial" panose="020B0604020202020204" pitchFamily="34" charset="0"/>
                 <a:cs typeface="Arial" panose="020B0604020202020204" pitchFamily="34" charset="0"/>
               </a:rPr>
-              <a:t>:</a:t>
-            </a:r>
-            <a:r>
-              <a:rPr lang="en-GB" sz="2000" b="0" i="0" u="none" strike="noStrike" dirty="0">
-                <a:latin typeface="Arial" panose="020B0604020202020204" pitchFamily="34" charset="0"/>
-                <a:cs typeface="Arial" panose="020B0604020202020204" pitchFamily="34" charset="0"/>
-              </a:rPr>
-              <a:t> </a:t>
-            </a:r>
-            <a:r>
-              <a:rPr lang="en-GB" sz="2000" b="0" i="0" u="none" strike="noStrike" baseline="0" dirty="0">
-                <a:latin typeface="Arial" panose="020B0604020202020204" pitchFamily="34" charset="0"/>
-                <a:cs typeface="Arial" panose="020B0604020202020204" pitchFamily="34" charset="0"/>
-              </a:rPr>
               <a:t> Only J can read the key</a:t>
             </a:r>
           </a:p>
@@ -5620,35 +5606,28 @@
               <a:t>Suppose the public key file for J is </a:t>
             </a:r>
             <a:r>
-              <a:rPr lang="en-GB" sz="2000" b="0" i="0" u="none" strike="noStrike" baseline="0" dirty="0">
+              <a:rPr lang="en-GB" sz="2000" b="0" i="0" u="none" strike="noStrike" baseline="0">
                 <a:latin typeface="Arial" panose="020B0604020202020204" pitchFamily="34" charset="0"/>
                 <a:cs typeface="Arial" panose="020B0604020202020204" pitchFamily="34" charset="0"/>
               </a:rPr>
               <a:t>object </a:t>
             </a:r>
             <a:r>
-              <a:rPr lang="en-GB" sz="2000" dirty="0">
+              <a:rPr lang="en-GB" sz="2000">
                 <a:latin typeface="Arial" panose="020B0604020202020204" pitchFamily="34" charset="0"/>
                 <a:cs typeface="Arial" panose="020B0604020202020204" pitchFamily="34" charset="0"/>
               </a:rPr>
-              <a:t>~/.ssh/</a:t>
-            </a:r>
-            <a:r>
-              <a:rPr lang="en-GB" sz="2000" dirty="0" err="1">
+              <a:t>O2</a:t>
+            </a:r>
+            <a:r>
+              <a:rPr lang="en-GB" sz="2000" b="0" i="0" u="none" strike="noStrike" baseline="0">
                 <a:latin typeface="Arial" panose="020B0604020202020204" pitchFamily="34" charset="0"/>
                 <a:cs typeface="Arial" panose="020B0604020202020204" pitchFamily="34" charset="0"/>
               </a:rPr>
-              <a:t>key.pub</a:t>
-            </a:r>
-            <a:r>
-              <a:rPr lang="en-GB" sz="2000" b="0" i="0" u="none" strike="noStrike" baseline="0" dirty="0">
-                <a:latin typeface="Arial" panose="020B0604020202020204" pitchFamily="34" charset="0"/>
-                <a:cs typeface="Arial" panose="020B0604020202020204" pitchFamily="34" charset="0"/>
-              </a:rPr>
               <a:t>:</a:t>
             </a:r>
             <a:r>
-              <a:rPr lang="en-GB" sz="2000" b="0" i="0" u="none" strike="noStrike" dirty="0">
+              <a:rPr lang="en-GB" sz="2000" b="0" i="0" u="none" strike="noStrike">
                 <a:latin typeface="Arial" panose="020B0604020202020204" pitchFamily="34" charset="0"/>
                 <a:cs typeface="Arial" panose="020B0604020202020204" pitchFamily="34" charset="0"/>
               </a:rPr>
@@ -6425,7 +6404,7 @@
           <p:nvPr>
             <p:extLst>
               <p:ext uri="{D42A27DB-BD31-4B8C-83A1-F6EECF244321}">
-                <p14:modId xmlns:p14="http://schemas.microsoft.com/office/powerpoint/2010/main" val="2216700862"/>
+                <p14:modId xmlns:p14="http://schemas.microsoft.com/office/powerpoint/2010/main" val="2168363007"/>
               </p:ext>
             </p:extLst>
           </p:nvPr>
@@ -6488,7 +6467,7 @@
                     <a:p>
                       <a:r>
                         <a:rPr lang="en-US" dirty="0"/>
-                        <a:t>~/.ssh/key</a:t>
+                        <a:t>O1</a:t>
                       </a:r>
                       <a:endParaRPr lang="en-GB" dirty="0"/>
                     </a:p>
@@ -6502,11 +6481,7 @@
                     <a:p>
                       <a:r>
                         <a:rPr lang="en-US" dirty="0"/>
-                        <a:t>~/.ssh/</a:t>
-                      </a:r>
-                      <a:r>
-                        <a:rPr lang="en-US" dirty="0" err="1"/>
-                        <a:t>key.pub</a:t>
+                        <a:t>O2</a:t>
                       </a:r>
                       <a:endParaRPr lang="en-GB" dirty="0"/>
                     </a:p>
